--- a/ws2/files/branded/WS2_Site_Owner_Briefing.pptx
+++ b/ws2/files/branded/WS2_Site_Owner_Briefing.pptx
@@ -109,17 +109,17 @@
   <p:extLst>
     <p:ext uri="{521415D9-36F7-43E2-AB2F-B90AF26B5E84}">
       <p14:sectionLst xmlns:p14="http://schemas.microsoft.com/office/powerpoint/2010/main">
-        <p14:section name="Session overview" id="{c0e3373a-33a5-0507-ddb6-d4d54d757cdc}">
+        <p14:section name="Session overview" id="{aac811bf-af8d-7e5d-a0c6-6f9925ed4ff8}">
           <p14:sldIdLst>
             <p14:sldId id="256"/>
           </p14:sldIdLst>
         </p14:section>
-        <p14:section name="Breakout" id="{2d94b9c9-e9f2-84e0-63b6-bed9fdc51339}">
+        <p14:section name="Breakout" id="{176983d3-7e29-fab7-7110-62c96d3d7a4b}">
           <p14:sldIdLst>
             <p14:sldId id="257"/>
           </p14:sldIdLst>
         </p14:section>
-        <p14:section name="FAQ" id="{3fa59061-9fbb-c470-51e7-8fb85a3c4dd0}">
+        <p14:section name="FAQ" id="{88f5c4c1-f8e5-3242-ce5f-0c68b7e52cbf}">
           <p14:sldIdLst>
             <p14:sldId id="258"/>
           </p14:sldIdLst>
@@ -531,9 +531,9 @@
               <a:t>Walk through the session left to right.
 1. Introduction (10 min, plenary): why the PM role is changing, and the goal of the session: define your work around AI. Participants already know their room, so they go straight in afterwards.
 2. AI use cases (2 x 15 min, plenary): two real use cases show what an agent can take over and what it took to get there.
-3. Breakout (60 min, rooms C1 to C6): each room works one KESTREL case, designs and tests one agent, and leaves with a Pilot Pack and a 90-second debrief card. Facilitator and Builder per room; the room readout is read aloud at minute 0.
-4. Wrap-up (20 min, plenary): the Summit Debrief. Each room reads its card, everyone votes on which pilot they would implement on Monday morning, three awards, pilot owners named.
-Before: rooms are allocated in the invitation on 29 Oct and pre-work is done by 3 Nov. On the day, site owners provide rooms, screens, network, the capture link with a paper fallback, and the live scoreboard. After: pilot owners by 12 Nov, 30-day readout in early December.</a:t>
+3. Breakout (60 min, rooms C1 to C6): each room works one KESTREL case. The group lead runs the room and builds the agent in Agent Builder; the team checks and records the results. Every room leaves with a Pilot Pack and a 90-second summary.
+4. Wrap-up (20 min, plenary): the Summit Debrief. Each room shares its 90-second summary: what it will try next week, the time it could save and what it still has to fix. Feedback coordinators are named.
+Before: rooms are allocated in the invitation on 29 Oct and pre-work is done by 3 Nov; every group lead has Agent Builder activated. On the day, site owners provide a space per room near the plenary, a laptop, screen, network and tool access, and the case, sample data and Pilot Pack. After: every room tries its agent the week after the summit, the feedback coordinators collect the results, and the 30-day readout follows in early December.</a:t>
             </a:r>
             <a:endParaRPr lang="en-US" dirty="0"/>
           </a:p>
@@ -621,17 +621,17 @@
           <a:p>
             <a:r>
               <a:rPr lang="en-US" dirty="0"/>
-              <a:t>This is the 60-minute breakout, the same in every room and every region.
-Before the day: every participant already knows their room and case file (C1 to C6) from the invitation, and has done the pre-work. Nothing is allocated or prepared on 5 November. The 60-minute clock starts when the room is seated, so keep breakout rooms close to the plenary.
-1. Orient, 0 to 5: the facilitator reads the 45-second cold open and the case card aloud, names Scribe, Timekeeper, Builders and Challengers. The Builder opens Agent Builder; if it fails, the room chooses paper mode now.
-2. Map the hours, 5 to 15: the room times each step of the job, picks the biggest repetitive chunk, and states the baseline in hours per PM per week and what those hours would buy the project.
-3. Design the agent, 15 to 27: the room writes the agent's instructions, names what the PM keeps deciding, names the one failure the agent must never cause, and writes three tests: does the job, time test, trust check.
-4. Build &amp; challenge, 27 to 42: two sub-teams. Builders create the agent in Agent Builder and run the three tests on the sample data. Challengers start from the named failure and pressure-test value, data, quality, tool, accountability, adoption and metric.
-5. Fix &amp; decide, 42 to 50: one new rule per failed test, one guardrail against the failure, one metric, and the level reached: Level 1 designed (required), Level 2 tested, Level 3 a working agent saved in Agent Builder.
-6. Package &amp; commit, 50 to 60: pilot owner, first test and start date; rehearse the 90-second debrief card once; submit the Pilot Pack through the capture link.
-Then all rooms return to the plenary for the Summit Debrief: cards in the order C2, C5, C1, C4, C6, C3, the Monday-morning vote (never for your own room) and three awards.
-Site owners: one space per room close to the plenary, a shared screen, network, the capture link (MS Form) and printed backups of the case file, sample data and a blank Pilot Pack.
-If something goes wrong: tool or network down for more than 3 minutes, switch to the "Be the agent" paper test, which still reaches Level 2. Behind at minute 50, cut solution detail but never the owner, first test, hours back or guardrail. Facilitator missing, the Scribe runs the room with the timer.</a:t>
+              <a:t>The 60-minute breakout: one common plan for all rooms.
+Before the day: every participant knows their room and case (C1 to C6) from the invitation and has done the pre-work. Each group lead has Agent Builder activated in Copilot Premium.
+1. Orient, 0 to 5: the group lead reads the case aloud, assigns roles and opens Agent Builder. Checkpoint: roles assigned, Agent Builder ready to use.
+2. Map the hours, 5 to 15: estimate the time per task, pick the repetitive work the agent can help with and a use for the time saved. Checkpoint: current hours per PM per week and the expected benefit.
+3. Design the agent, 15 to 27: write the instructions and what the PM still decides; define a key failure and what counts as passing each test. Checkpoint: three tests: quality, time saved, PM approval rules.
+4. Build &amp; challenge, 27 to 42: the group lead builds the agent and runs the three tests; the other members check the results and suggest modifications. Checkpoint: results and task time, including the PM review, recorded.
+5. Fix &amp; decide, 42 to 50: fix and rerun failed tests; agree what the agent must check with the PM before acting. Checkpoint: instructions updated; tests passed, or the fixes still needed.
+6. Package &amp; commit, 50 to 60: choose a feedback coordinator and a task for everyone next week, once tests pass and access is ready. Checkpoint: coordinator on the card, Pilot Pack submitted, 90-second summary practised.
+After: the rooms return for the wrap-up, where each room shares its 90-second summary: what it will try next week, the time it could save and what it still has to fix.
+Every room: at most 8 people with mixed experience. The group lead facilitates and builds; the team checks and records results. Each room needs a space near the whole-group session, a laptop, screen, network and tool access, and the case, sample data and Pilot Pack.
+If something goes wrong: running late, keep the checks and next steps. Group lead absent, the room chooses a replacement.</a:t>
             </a:r>
             <a:endParaRPr lang="en-US" dirty="0"/>
           </a:p>
@@ -720,11 +720,10 @@
             <a:r>
               <a:rPr lang="en-US" dirty="0"/>
               <a:t>The twelve questions we expect most. Left column: before the summit. Right column: on the day and after.
-Dates: allocation final Mon 26 Oct; invitation and pre-work sent Thu 29 Oct; facilitator and Builder briefing Fri 23 Oct; pre-work and Builder access done Tue 3 Nov; summit Thu 5 Nov; packs merged and pilot owners confirmed Thu 12 Nov; 30-day readout early December.
-Agent Builder access: Builders request it through the form https://forms.cloud.microsoft/e/KjfvXMztWp and confirm they can create a test agent before 3 Nov, never in the room.
+Dates: group lead briefing Fri 23 Oct; allocation final Mon 26 Oct; invitation and pre-work sent Thu 29 Oct; pre-work done and group leads confirm Agent Builder access Tue 3 Nov; summit Thu 5 Nov; 30-day readout early December.
+Agent Builder access: group leads request it through the form https://forms.cloud.microsoft/e/KjfvXMztWp and confirm they can create a test agent before 3 Nov, never in the room.
 Data: rooms paste only the KESTREL case files into the tool. Real project data enters a pilot only through an approved tool and with data approval.
-Rooms of five or fewer combine Facilitator with Timekeeper, and Scribe with Challenger.
-The capture link is an MS Form that mirrors the Pilot Pack; the fallback is the printed Pilot Pack, photographed and submitted.</a:t>
+Pilot Packs are submitted through the capture link, an MS Form that mirrors the Pilot Pack.</a:t>
             </a:r>
             <a:endParaRPr lang="en-US" dirty="0"/>
           </a:p>
@@ -1505,7 +1504,7 @@
                   <a:schemeClr val="bg2"/>
                 </a:solidFill>
               </a:rPr>
-              <a:t>120 minutes, the same in every region. One outcome: pilots people want to run on Monday.</a:t>
+              <a:t>120 minutes, the same in every region. One outcome: an agent every room tries the week after.</a:t>
             </a:r>
             <a:endParaRPr lang="en-US" sz="1400" dirty="0"/>
           </a:p>
@@ -2520,7 +2519,7 @@
                   <a:schemeClr val="accent1"/>
                 </a:solidFill>
               </a:rPr>
-              <a:t>60 min · rooms C1–C6 · facilitator + Builder</a:t>
+              <a:t>60 min · rooms C1–C6 · group lead + team</a:t>
             </a:r>
             <a:endParaRPr lang="en-US" sz="1100" dirty="0"/>
           </a:p>
@@ -2944,7 +2943,7 @@
                   <a:schemeClr val="bg1"/>
                 </a:solidFill>
               </a:rPr>
-              <a:t>Output: Pilot Pack + 90-second debrief card</a:t>
+              <a:t>Output: Pilot Pack + 90-second summary</a:t>
             </a:r>
             <a:endParaRPr lang="en-US" sz="1400" dirty="0"/>
           </a:p>
@@ -3137,7 +3136,7 @@
                   <a:schemeClr val="bg1"/>
                 </a:solidFill>
               </a:rPr>
-              <a:t>Summit Debrief, 90 s per room</a:t>
+              <a:t>Summit Debrief: 90 s per room</a:t>
             </a:r>
             <a:endParaRPr lang="en-US" sz="1400" dirty="0"/>
           </a:p>
@@ -3155,7 +3154,7 @@
                   <a:schemeClr val="bg1"/>
                 </a:solidFill>
               </a:rPr>
-              <a:t>Vote: which pilot on Monday morning?</a:t>
+              <a:t>What each room tries next week</a:t>
             </a:r>
             <a:endParaRPr lang="en-US" sz="1400" dirty="0"/>
           </a:p>
@@ -3173,7 +3172,7 @@
                   <a:schemeClr val="bg1"/>
                 </a:solidFill>
               </a:rPr>
-              <a:t>Three awards, pilot owners named</a:t>
+              <a:t>Feedback coordinators named</a:t>
             </a:r>
             <a:endParaRPr lang="en-US" sz="1400" dirty="0"/>
           </a:p>
@@ -3307,7 +3306,7 @@
                   <a:schemeClr val="bg1"/>
                 </a:solidFill>
               </a:rPr>
-              <a:t>One Builder per room with Agent Builder</a:t>
+              <a:t>Group lead per room with Agent Builder</a:t>
             </a:r>
             <a:endParaRPr lang="en-US" sz="1400" dirty="0"/>
           </a:p>
@@ -3405,7 +3404,7 @@
                   <a:schemeClr val="bg1"/>
                 </a:solidFill>
               </a:rPr>
-              <a:t>A room, screen and network per breakout</a:t>
+              <a:t>A space per room near the plenary</a:t>
             </a:r>
             <a:endParaRPr lang="en-US" sz="1400" dirty="0"/>
           </a:p>
@@ -3423,7 +3422,7 @@
                   <a:schemeClr val="bg1"/>
                 </a:solidFill>
               </a:rPr>
-              <a:t>Capture link plus paper fallback</a:t>
+              <a:t>Laptop, screen, network, tool access</a:t>
             </a:r>
             <a:endParaRPr lang="en-US" sz="1400" dirty="0"/>
           </a:p>
@@ -3441,7 +3440,7 @@
                   <a:schemeClr val="bg1"/>
                 </a:solidFill>
               </a:rPr>
-              <a:t>Live scoreboard on the plenary screen</a:t>
+              <a:t>Case, sample data and Pilot Pack</a:t>
             </a:r>
             <a:endParaRPr lang="en-US" sz="1400" dirty="0"/>
           </a:p>
@@ -3539,7 +3538,7 @@
                   <a:schemeClr val="bg1"/>
                 </a:solidFill>
               </a:rPr>
-              <a:t>Pilot owners confirmed by 12 Nov</a:t>
+              <a:t>Each room tries its agent the next week</a:t>
             </a:r>
             <a:endParaRPr lang="en-US" sz="1400" dirty="0"/>
           </a:p>
@@ -3557,7 +3556,25 @@
                   <a:schemeClr val="bg1"/>
                 </a:solidFill>
               </a:rPr>
-              <a:t>30-day pilot readout in early December</a:t>
+              <a:t>Feedback coordinators collect results</a:t>
+            </a:r>
+            <a:endParaRPr lang="en-US" sz="1400" dirty="0"/>
+          </a:p>
+          <a:p>
+            <a:pPr marL="177800" indent="-177800">
+              <a:spcAft>
+                <a:spcPts val="200"/>
+              </a:spcAft>
+              <a:buSzPct val="100000"/>
+              <a:buChar char="•"/>
+            </a:pPr>
+            <a:r>
+              <a:rPr lang="en-US" sz="1400" dirty="0">
+                <a:solidFill>
+                  <a:schemeClr val="bg1"/>
+                </a:solidFill>
+              </a:rPr>
+              <a:t>30-day readout in early December</a:t>
             </a:r>
             <a:endParaRPr lang="en-US" sz="1400" dirty="0"/>
           </a:p>
@@ -3663,7 +3680,7 @@
                   <a:schemeClr val="accent1"/>
                 </a:solidFill>
               </a:rPr>
-              <a:t>BREAKOUT · 60 MINUTES · THE SAME IN EVERY ROOM AND REGION</a:t>
+              <a:t>BREAKOUT · 60 MINUTES · COMMON PLAN FOR ALL ROOMS</a:t>
             </a:r>
             <a:endParaRPr lang="en-US" sz="1100" dirty="0"/>
           </a:p>
@@ -3739,7 +3756,7 @@
                   <a:schemeClr val="bg2"/>
                 </a:solidFill>
               </a:rPr>
-              <a:t>One case per room, six steps, a checkpoint after each. Every room leaves with a Pilot Pack.</a:t>
+              <a:t>Six steps per room. Every Pilot Pack records results, unfinished work and next steps.</a:t>
             </a:r>
             <a:endParaRPr lang="en-US" sz="1400" dirty="0"/>
           </a:p>
@@ -3775,7 +3792,7 @@
                   <a:schemeClr val="bg2"/>
                 </a:solidFill>
               </a:rPr>
-              <a:t>MINUTE</a:t>
+              <a:t>MINUTES</a:t>
             </a:r>
             <a:endParaRPr lang="en-US" sz="1050" dirty="0"/>
           </a:p>
@@ -4134,7 +4151,7 @@
                   <a:schemeClr val="bg1"/>
                 </a:solidFill>
               </a:rPr>
-              <a:t>Read the cold open and the case card aloud. Name the roles. The Builder opens Agent Builder.</a:t>
+              <a:t>The group lead reads the case aloud, assigns roles and opens Agent Builder.</a:t>
             </a:r>
             <a:endParaRPr lang="en-US" sz="1300" dirty="0"/>
           </a:p>
@@ -4170,7 +4187,7 @@
                   <a:schemeClr val="bg1"/>
                 </a:solidFill>
               </a:rPr>
-              <a:t>Roles named; tool open, or paper mode chosen</a:t>
+              <a:t>Roles assigned. Agent Builder ready to use</a:t>
             </a:r>
             <a:endParaRPr lang="en-US" sz="1300" dirty="0"/>
           </a:p>
@@ -4421,7 +4438,7 @@
                   <a:schemeClr val="bg1"/>
                 </a:solidFill>
               </a:rPr>
-              <a:t>Time each step of the job. Pick the biggest repetitive chunk and what those hours would buy.</a:t>
+              <a:t>Estimate time per task. Pick repetitive work the agent can help with and a use for the time saved.</a:t>
             </a:r>
             <a:endParaRPr lang="en-US" sz="1300" dirty="0"/>
           </a:p>
@@ -4457,7 +4474,7 @@
                   <a:schemeClr val="bg1"/>
                 </a:solidFill>
               </a:rPr>
-              <a:t>Baseline in hours per PM per week, and its business impact</a:t>
+              <a:t>Current hours per PM per week and expected benefit</a:t>
             </a:r>
             <a:endParaRPr lang="en-US" sz="1300" dirty="0"/>
           </a:p>
@@ -4708,7 +4725,7 @@
                   <a:schemeClr val="bg1"/>
                 </a:solidFill>
               </a:rPr>
-              <a:t>Brief the agent like a new colleague. Name what the PM decides, and the one way it could fail.</a:t>
+              <a:t>Write instructions and what the PM still decides. Define a key failure and what counts as passing each test.</a:t>
             </a:r>
             <a:endParaRPr lang="en-US" sz="1300" dirty="0"/>
           </a:p>
@@ -4744,7 +4761,7 @@
                   <a:schemeClr val="bg1"/>
                 </a:solidFill>
               </a:rPr>
-              <a:t>Instructions drafted, three tests written</a:t>
+              <a:t>Three tests: quality, time saved, PM approval rules</a:t>
             </a:r>
             <a:endParaRPr lang="en-US" sz="1300" dirty="0"/>
           </a:p>
@@ -4963,20 +4980,6 @@
             </a:r>
             <a:endParaRPr lang="en-US" sz="1400" dirty="0"/>
           </a:p>
-          <a:p>
-            <a:pPr indent="0" marL="0">
-              <a:buNone/>
-            </a:pPr>
-            <a:r>
-              <a:rPr lang="en-US" sz="1100" dirty="0">
-                <a:solidFill>
-                  <a:schemeClr val="accent2"/>
-                </a:solidFill>
-              </a:rPr>
-              <a:t>two sub-teams in parallel</a:t>
-            </a:r>
-            <a:endParaRPr lang="en-US" sz="1400" dirty="0"/>
-          </a:p>
         </p:txBody>
       </p:sp>
       <p:sp>
@@ -5009,7 +5012,7 @@
                   <a:schemeClr val="bg1"/>
                 </a:solidFill>
               </a:rPr>
-              <a:t>Builders create the agent and run the three tests. Challengers hunt the failure and write a guardrail.</a:t>
+              <a:t>The group lead builds the agent and runs three tests. Other members check results and suggest modifications.</a:t>
             </a:r>
             <a:endParaRPr lang="en-US" sz="1300" dirty="0"/>
           </a:p>
@@ -5045,7 +5048,7 @@
                   <a:schemeClr val="bg1"/>
                 </a:solidFill>
               </a:rPr>
-              <a:t>Test results and review time recorded</a:t>
+              <a:t>Results and task time, including PM review, recorded</a:t>
             </a:r>
             <a:endParaRPr lang="en-US" sz="1300" dirty="0"/>
           </a:p>
@@ -5296,7 +5299,7 @@
                   <a:schemeClr val="bg1"/>
                 </a:solidFill>
               </a:rPr>
-              <a:t>Add one rule per failed test. Choose one guardrail and one metric. Decide the level reached.</a:t>
+              <a:t>Fix and rerun failed tests. Agree what the agent must check with the PM before acting.</a:t>
             </a:r>
             <a:endParaRPr lang="en-US" sz="1300" dirty="0"/>
           </a:p>
@@ -5332,7 +5335,7 @@
                   <a:schemeClr val="bg1"/>
                 </a:solidFill>
               </a:rPr>
-              <a:t>Final instructions, guardrail, level reached</a:t>
+              <a:t>Instructions updated. Tests passed or fixes still needed.</a:t>
             </a:r>
             <a:endParaRPr lang="en-US" sz="1300" dirty="0"/>
           </a:p>
@@ -5583,7 +5586,7 @@
                   <a:schemeClr val="bg1"/>
                 </a:solidFill>
               </a:rPr>
-              <a:t>Name the pilot owner and the first test. Rehearse the debrief card (90 seconds) once.</a:t>
+              <a:t>Choose a feedback coordinator and a task for everyone next week, once tests pass and access is ready.</a:t>
             </a:r>
             <a:endParaRPr lang="en-US" sz="1300" dirty="0"/>
           </a:p>
@@ -5619,7 +5622,7 @@
                   <a:schemeClr val="bg1"/>
                 </a:solidFill>
               </a:rPr>
-              <a:t>Pilot Pack submitted, debrief card ready</a:t>
+              <a:t>Coordinator on card. Pack submitted. 90‑second summary practised.</a:t>
             </a:r>
             <a:endParaRPr lang="en-US" sz="1300" dirty="0"/>
           </a:p>
@@ -5679,7 +5682,7 @@
                   <a:schemeClr val="accent1"/>
                 </a:solidFill>
               </a:rPr>
-              <a:t>60′ →</a:t>
+              <a:t>AFTER</a:t>
             </a:r>
             <a:endParaRPr lang="en-US" sz="1300" dirty="0"/>
           </a:p>
@@ -5768,7 +5771,7 @@
                   <a:schemeClr val="bg1"/>
                 </a:solidFill>
               </a:rPr>
-              <a:t>All rooms meet in the plenary. Each reads its card in 90 seconds; then one vote, three awards.</a:t>
+              <a:t>Return for the proposed wrap-up. Each room shares a 90‑second summary.</a:t>
             </a:r>
             <a:endParaRPr lang="en-US" sz="1300" dirty="0"/>
           </a:p>
@@ -5804,7 +5807,7 @@
                   <a:schemeClr val="bg1"/>
                 </a:solidFill>
               </a:rPr>
-              <a:t>Monday-morning pilot chosen by vote</a:t>
+              <a:t>What you’ll try next week, time you could save and what to fix</a:t>
             </a:r>
             <a:endParaRPr lang="en-US" sz="1300" dirty="0"/>
           </a:p>
@@ -5819,7 +5822,7 @@
         <p:spPr>
           <a:xfrm>
             <a:off x="457200" y="5193792"/>
-            <a:ext cx="3246120" cy="1152144"/>
+            <a:ext cx="3520440" cy="1152144"/>
           </a:xfrm>
           <a:prstGeom prst="roundRect">
             <a:avLst>
@@ -5841,7 +5844,7 @@
         <p:spPr>
           <a:xfrm>
             <a:off x="640080" y="5303520"/>
-            <a:ext cx="2880360" cy="219456"/>
+            <a:ext cx="3154680" cy="219456"/>
           </a:xfrm>
           <a:prstGeom prst="rect">
             <a:avLst/>
@@ -5877,7 +5880,7 @@
         <p:spPr>
           <a:xfrm>
             <a:off x="640080" y="5577840"/>
-            <a:ext cx="2971800" cy="694944"/>
+            <a:ext cx="3246120" cy="694944"/>
           </a:xfrm>
           <a:prstGeom prst="rect">
             <a:avLst/>
@@ -5902,7 +5905,7 @@
                   <a:schemeClr val="bg1"/>
                 </a:solidFill>
               </a:rPr>
-              <a:t>5–8 people, mixed experience</a:t>
+              <a:t>Max. 8 people, mixed experience</a:t>
             </a:r>
             <a:endParaRPr lang="en-US" sz="1300" dirty="0"/>
           </a:p>
@@ -5920,7 +5923,7 @@
                   <a:schemeClr val="bg1"/>
                 </a:solidFill>
               </a:rPr>
-              <a:t>Facilitator: runs process and clock</a:t>
+              <a:t>Group lead: facilitates and builds</a:t>
             </a:r>
             <a:endParaRPr lang="en-US" sz="1300" dirty="0"/>
           </a:p>
@@ -5938,7 +5941,7 @@
                   <a:schemeClr val="bg1"/>
                 </a:solidFill>
               </a:rPr>
-              <a:t>Builder: builds the agent on screen</a:t>
+              <a:t>Team: checks and records results</a:t>
             </a:r>
             <a:endParaRPr lang="en-US" sz="1300" dirty="0"/>
           </a:p>
@@ -5952,8 +5955,8 @@
         </p:nvSpPr>
         <p:spPr>
           <a:xfrm>
-            <a:off x="3886200" y="5193792"/>
-            <a:ext cx="3246120" cy="1152144"/>
+            <a:off x="4160520" y="5193792"/>
+            <a:ext cx="3520440" cy="1152144"/>
           </a:xfrm>
           <a:prstGeom prst="roundRect">
             <a:avLst>
@@ -5974,8 +5977,8 @@
         </p:nvSpPr>
         <p:spPr>
           <a:xfrm>
-            <a:off x="4069080" y="5303520"/>
-            <a:ext cx="2880360" cy="219456"/>
+            <a:off x="4343400" y="5303520"/>
+            <a:ext cx="3154680" cy="219456"/>
           </a:xfrm>
           <a:prstGeom prst="rect">
             <a:avLst/>
@@ -6010,8 +6013,8 @@
         </p:nvSpPr>
         <p:spPr>
           <a:xfrm>
-            <a:off x="4069080" y="5577840"/>
-            <a:ext cx="2971800" cy="694944"/>
+            <a:off x="4343400" y="5577840"/>
+            <a:ext cx="3246120" cy="694944"/>
           </a:xfrm>
           <a:prstGeom prst="rect">
             <a:avLst/>
@@ -6036,7 +6039,7 @@
                   <a:schemeClr val="bg1"/>
                 </a:solidFill>
               </a:rPr>
-              <a:t>A space close to the plenary</a:t>
+              <a:t>A space near the whole-group session</a:t>
             </a:r>
             <a:endParaRPr lang="en-US" sz="1300" dirty="0"/>
           </a:p>
@@ -6054,7 +6057,7 @@
                   <a:schemeClr val="bg1"/>
                 </a:solidFill>
               </a:rPr>
-              <a:t>Screen, network, capture link</a:t>
+              <a:t>Laptop, screen, network and tool access</a:t>
             </a:r>
             <a:endParaRPr lang="en-US" sz="1300" dirty="0"/>
           </a:p>
@@ -6072,7 +6075,7 @@
                   <a:schemeClr val="bg1"/>
                 </a:solidFill>
               </a:rPr>
-              <a:t>Printed case file and Pilot Pack</a:t>
+              <a:t>Case, sample data and Pilot Pack</a:t>
             </a:r>
             <a:endParaRPr lang="en-US" sz="1300" dirty="0"/>
           </a:p>
@@ -6086,8 +6089,8 @@
         </p:nvSpPr>
         <p:spPr>
           <a:xfrm>
-            <a:off x="7315200" y="5193792"/>
-            <a:ext cx="4416552" cy="1152144"/>
+            <a:off x="7863840" y="5193792"/>
+            <a:ext cx="3867912" cy="1152144"/>
           </a:xfrm>
           <a:prstGeom prst="roundRect">
             <a:avLst>
@@ -6108,8 +6111,8 @@
         </p:nvSpPr>
         <p:spPr>
           <a:xfrm>
-            <a:off x="7498080" y="5303520"/>
-            <a:ext cx="4050792" cy="219456"/>
+            <a:off x="8046720" y="5303520"/>
+            <a:ext cx="3502152" cy="219456"/>
           </a:xfrm>
           <a:prstGeom prst="rect">
             <a:avLst/>
@@ -6144,8 +6147,8 @@
         </p:nvSpPr>
         <p:spPr>
           <a:xfrm>
-            <a:off x="7498080" y="5577840"/>
-            <a:ext cx="4142232" cy="694944"/>
+            <a:off x="8046720" y="5577840"/>
+            <a:ext cx="3593592" cy="694944"/>
           </a:xfrm>
           <a:prstGeom prst="rect">
             <a:avLst/>
@@ -6170,7 +6173,7 @@
                   <a:schemeClr val="bg1"/>
                 </a:solidFill>
               </a:rPr>
-              <a:t>Tool down over 3 min → “Be the agent” paper test</a:t>
+              <a:t>Running late? Keep checks and next steps.</a:t>
             </a:r>
             <a:endParaRPr lang="en-US" sz="1300" dirty="0"/>
           </a:p>
@@ -6188,25 +6191,7 @@
                   <a:schemeClr val="bg1"/>
                 </a:solidFill>
               </a:rPr>
-              <a:t>Behind at 50′ → cut detail, keep owner and guardrail</a:t>
-            </a:r>
-            <a:endParaRPr lang="en-US" sz="1300" dirty="0"/>
-          </a:p>
-          <a:p>
-            <a:pPr marL="177800" indent="-177800">
-              <a:spcAft>
-                <a:spcPts val="200"/>
-              </a:spcAft>
-              <a:buSzPct val="100000"/>
-              <a:buChar char="•"/>
-            </a:pPr>
-            <a:r>
-              <a:rPr lang="en-US" sz="1300" dirty="0">
-                <a:solidFill>
-                  <a:schemeClr val="bg1"/>
-                </a:solidFill>
-              </a:rPr>
-              <a:t>Facilitator missing → the Scribe runs the room</a:t>
+              <a:t>Group lead absent? Choose a replacement.</a:t>
             </a:r>
             <a:endParaRPr lang="en-US" sz="1300" dirty="0"/>
           </a:p>
@@ -6838,7 +6823,7 @@
                   <a:schemeClr val="bg1"/>
                 </a:solidFill>
               </a:rPr>
-              <a:t>No. Each room needs one Builder with Agent Builder in Copilot Premium. Everyone else brings ideas and project experience.</a:t>
+              <a:t>No. The group lead builds the agent with Agent Builder in Copilot Premium. The team checks results and brings experience.</a:t>
             </a:r>
             <a:endParaRPr lang="en-US" sz="1300" dirty="0"/>
           </a:p>
@@ -6952,7 +6937,7 @@
                   <a:schemeClr val="accent1"/>
                 </a:solidFill>
               </a:rPr>
-              <a:t>What if a Builder doesn’t have Agent Builder yet?</a:t>
+              <a:t>What if a group lead doesn’t have Agent Builder yet?</a:t>
             </a:r>
             <a:endParaRPr lang="en-US" sz="1400" dirty="0"/>
           </a:p>
@@ -7017,7 +7002,7 @@
                   <a:schemeClr val="bg1"/>
                 </a:solidFill>
               </a:rPr>
-              <a:t> and confirm access by 3 Nov. In the room, the paper test is the fallback.</a:t>
+              <a:t> and confirm access by 3 Nov. It must be ready to use when the room starts.</a:t>
             </a:r>
             <a:endParaRPr lang="en-US" sz="1300" dirty="0"/>
           </a:p>
@@ -7167,7 +7152,7 @@
                   <a:schemeClr val="bg1"/>
                 </a:solidFill>
               </a:rPr>
-              <a:t>A facilitator named by the regional lead. They run the process and the clock, need no AI expertise, and are briefed on 23 Oct.</a:t>
+              <a:t>A group lead named by the regional lead, who facilitates and builds the agent (briefing 23 Oct). The team checks and records results.</a:t>
             </a:r>
             <a:endParaRPr lang="en-US" sz="1300" dirty="0"/>
           </a:p>
@@ -7467,7 +7452,7 @@
                   <a:schemeClr val="bg1"/>
                 </a:solidFill>
               </a:rPr>
-              <a:t>5 to 8 with mixed experience. Above 10, split into two rooms on the same case. In rooms of five or fewer, people combine roles.</a:t>
+              <a:t>At most 8, with mixed experience. Larger groups split into two rooms on the same case.</a:t>
             </a:r>
             <a:endParaRPr lang="en-US" sz="1300" dirty="0"/>
           </a:p>
@@ -7617,7 +7602,7 @@
                   <a:schemeClr val="bg1"/>
                 </a:solidFill>
               </a:rPr>
-              <a:t>Per room: a space near the plenary, a screen, network, the capture link and printed backups. In plenary: the live scoreboard.</a:t>
+              <a:t>Per room: a space near the plenary, a laptop, screen, network and tool access, and the case, sample data and Pilot Pack.</a:t>
             </a:r>
             <a:endParaRPr lang="en-US" sz="1300" dirty="0"/>
           </a:p>
@@ -7881,7 +7866,7 @@
                   <a:schemeClr val="accent2"/>
                 </a:solidFill>
               </a:rPr>
-              <a:t>What if the tool or network fails?</a:t>
+              <a:t>What if a room runs late, or the group lead is absent?</a:t>
             </a:r>
             <a:endParaRPr lang="en-US" sz="1400" dirty="0"/>
           </a:p>
@@ -7917,7 +7902,7 @@
                   <a:schemeClr val="bg1"/>
                 </a:solidFill>
               </a:rPr>
-              <a:t>After 3 minutes, switch to “Be the agent”: one person plays the agent on paper, so the room can still test its instructions.</a:t>
+              <a:t>Running late: keep the checks and next steps, cut the rest. Group lead absent: the room chooses a replacement.</a:t>
             </a:r>
             <a:endParaRPr lang="en-US" sz="1300" dirty="0"/>
           </a:p>
@@ -8067,7 +8052,7 @@
                   <a:schemeClr val="bg1"/>
                 </a:solidFill>
               </a:rPr>
-              <a:t>A Pilot Pack (agent instructions, hours back, guardrail, owner, first test) and a 90-second card for the Summit Debrief.</a:t>
+              <a:t>A Pilot Pack with results, unfinished work and next steps, and a 90‑second summary for the Summit Debrief.</a:t>
             </a:r>
             <a:endParaRPr lang="en-US" sz="1300" dirty="0"/>
           </a:p>
@@ -8217,7 +8202,7 @@
                   <a:schemeClr val="bg1"/>
                 </a:solidFill>
               </a:rPr>
-              <a:t>Owners run their first test within two weeks. Packs are merged per case by 12 Nov; the 30-day readout follows in early December.</a:t>
+              <a:t>Everyone tries the agent the next week, once tests pass and access is ready. The feedback coordinator collects the results.</a:t>
             </a:r>
             <a:endParaRPr lang="en-US" sz="1300" dirty="0"/>
           </a:p>
